--- a/hot-topics.pptx
+++ b/hot-topics.pptx
@@ -5,7 +5,7 @@
     <p:sldMasterId id="2147483648" r:id="rId1"/>
   </p:sldMasterIdLst>
   <p:notesMasterIdLst>
-    <p:notesMasterId r:id="rId9"/>
+    <p:notesMasterId r:id="rId10"/>
   </p:notesMasterIdLst>
   <p:sldIdLst>
     <p:sldId id="256" r:id="rId2"/>
@@ -15,6 +15,7 @@
     <p:sldId id="260" r:id="rId6"/>
     <p:sldId id="261" r:id="rId7"/>
     <p:sldId id="262" r:id="rId8"/>
+    <p:sldId id="263" r:id="rId9"/>
   </p:sldIdLst>
   <p:sldSz cx="9144000" cy="5143500" type="screen16x9"/>
   <p:notesSz cx="6858000" cy="9144000"/>
@@ -3992,34 +3993,6 @@
           </a:p>
         </p:txBody>
       </p:sp>
-      <p:sp>
-        <p:nvSpPr>
-          <p:cNvPr id="3" name="Subtitle 2"/>
-          <p:cNvSpPr>
-            <a:spLocks noGrp="1"/>
-          </p:cNvSpPr>
-          <p:nvPr>
-            <p:ph idx="1" type="subTitle"/>
-          </p:nvPr>
-        </p:nvSpPr>
-        <p:spPr>
-          <a:xfrm>
-            <a:off x="1371600" y="2914650"/>
-            <a:ext cx="6400800" cy="1314450"/>
-          </a:xfrm>
-        </p:spPr>
-        <p:txBody>
-          <a:bodyPr/>
-          <a:lstStyle/>
-          <a:p>
-            <a:pPr lvl="0" indent="0" marL="0">
-              <a:buNone/>
-            </a:pPr>
-            <a:br/>
-            <a:br/>
-          </a:p>
-        </p:txBody>
-      </p:sp>
     </p:spTree>
   </p:cSld>
 </p:sld>
@@ -4555,7 +4528,7 @@
             </a:pPr>
             <a:r>
               <a:rPr/>
-              <a:t>Productivity Disaster!</a:t>
+              <a:t>Productivity Crisis!</a:t>
             </a:r>
           </a:p>
         </p:txBody>
@@ -4582,7 +4555,7 @@
               <a:rPr>
                 <a:hlinkClick r:id="rId2"/>
               </a:rPr>
-              <a:t>https://www.youtube.com/watch?v=cdRCDaQrHJ0</a:t>
+              <a:t>https://www.youtube-nocookie.com/watch?v=MVErL94YLGM</a:t>
             </a:r>
           </a:p>
         </p:txBody>
@@ -4909,6 +4882,87 @@
       <p:bldP spid="3" grpId="0" uiExpand="1" build="p"/>
     </p:bldLst>
   </p:timing>
+</p:sld>
+</file>
+
+<file path=ppt/slides/slide8.xml><?xml version="1.0" encoding="utf-8"?>
+<p:sld xmlns:a="http://schemas.openxmlformats.org/drawingml/2006/main" xmlns:r="http://schemas.openxmlformats.org/officeDocument/2006/relationships" xmlns:p="http://schemas.openxmlformats.org/presentationml/2006/main">
+  <p:cSld>
+    <p:spTree>
+      <p:nvGrpSpPr>
+        <p:cNvPr id="1" name=""/>
+        <p:cNvGrpSpPr/>
+        <p:nvPr/>
+      </p:nvGrpSpPr>
+      <p:grpSpPr>
+        <a:xfrm>
+          <a:off x="0" y="0"/>
+          <a:ext cx="0" cy="0"/>
+          <a:chOff x="0" y="0"/>
+          <a:chExt cx="0" cy="0"/>
+        </a:xfrm>
+      </p:grpSpPr>
+      <p:sp>
+        <p:nvSpPr>
+          <p:cNvPr id="2" name="Title 1"/>
+          <p:cNvSpPr>
+            <a:spLocks noGrp="1"/>
+          </p:cNvSpPr>
+          <p:nvPr>
+            <p:ph type="title"/>
+          </p:nvPr>
+        </p:nvSpPr>
+        <p:spPr/>
+        <p:txBody>
+          <a:bodyPr/>
+          <a:lstStyle/>
+          <a:p>
+            <a:pPr lvl="0" indent="0" marL="0">
+              <a:buNone/>
+            </a:pPr>
+            <a:r>
+              <a:rPr/>
+              <a:t>Discussion: Economic Reports</a:t>
+            </a:r>
+          </a:p>
+        </p:txBody>
+      </p:sp>
+      <p:sp>
+        <p:nvSpPr>
+          <p:cNvPr id="3" name="Content Placeholder 2"/>
+          <p:cNvSpPr>
+            <a:spLocks noGrp="1"/>
+          </p:cNvSpPr>
+          <p:nvPr>
+            <p:ph idx="1"/>
+          </p:nvPr>
+        </p:nvSpPr>
+        <p:spPr/>
+        <p:txBody>
+          <a:bodyPr/>
+          <a:lstStyle/>
+          <a:p>
+            <a:pPr lvl="0" indent="-342900" marL="342900">
+              <a:buAutoNum type="arabicPeriod"/>
+            </a:pPr>
+            <a:r>
+              <a:rPr/>
+              <a:t>What kind of language is used in economic reports on the news?</a:t>
+            </a:r>
+          </a:p>
+          <a:p>
+            <a:pPr lvl="0" indent="-342900" marL="342900">
+              <a:buAutoNum type="arabicPeriod"/>
+            </a:pPr>
+            <a:r>
+              <a:rPr/>
+              <a:t>Why does the news include a finance report?</a:t>
+            </a:r>
+          </a:p>
+        </p:txBody>
+      </p:sp>
+    </p:spTree>
+  </p:cSld>
 </p:sld>
 </file>
 

--- a/hot-topics.pptx
+++ b/hot-topics.pptx
@@ -4555,7 +4555,7 @@
               <a:rPr>
                 <a:hlinkClick r:id="rId2"/>
               </a:rPr>
-              <a:t>https://www.youtube-nocookie.com/watch?v=MVErL94YLGM</a:t>
+              <a:t>https://www.youtube.com/watch?v=MVErL94YLGM</a:t>
             </a:r>
           </a:p>
         </p:txBody>
